--- a/Clases/Clase 02 - Representación de Números en el Computador/FÍSICA COMPUTACIONAL III - Clase 2.pptx
+++ b/Clases/Clase 02 - Representación de Números en el Computador/FÍSICA COMPUTACIONAL III - Clase 2.pptx
@@ -229,7 +229,7 @@
           <a:p>
             <a:fld id="{1BD83A17-8B9E-4CC2-BC88-ED74D26C90AC}" type="datetimeFigureOut">
               <a:rPr lang="es-ES" smtClean="0"/>
-              <a:t>27/03/2025</a:t>
+              <a:t>02/04/2026</a:t>
             </a:fld>
             <a:endParaRPr lang="es-ES"/>
           </a:p>
@@ -407,7 +407,7 @@
     </inkml:brush>
   </inkml:definitions>
   <inkml:trace contextRef="#ctx0" brushRef="#br0">18764 14053 0</inkml:trace>
-  <inkml:trace contextRef="#ctx0" brushRef="#br0" timeOffset="530.84">18764 14053 0</inkml:trace>
+  <inkml:trace contextRef="#ctx0" brushRef="#br0" timeOffset="530.83">18764 14053 0</inkml:trace>
 </inkml:ink>
 </file>
 
@@ -493,7 +493,7 @@
           <a:p>
             <a:fld id="{7CD54351-0104-4751-804A-BF1BC2C9EE72}" type="datetimeFigureOut">
               <a:rPr lang="es-ES" smtClean="0"/>
-              <a:t>27/03/2025</a:t>
+              <a:t>02/04/2026</a:t>
             </a:fld>
             <a:endParaRPr lang="es-ES"/>
           </a:p>
@@ -892,7 +892,7 @@
           <a:p>
             <a:fld id="{F4488321-E57C-466D-AAE7-E6BCEB11C6B3}" type="datetime1">
               <a:rPr lang="es-ES" smtClean="0"/>
-              <a:t>27/03/2025</a:t>
+              <a:t>02/04/2026</a:t>
             </a:fld>
             <a:endParaRPr lang="es-ES"/>
           </a:p>
@@ -1062,7 +1062,7 @@
           <a:p>
             <a:fld id="{0C6638D9-00DB-4EA8-B21B-AC55F5666AAA}" type="datetime1">
               <a:rPr lang="es-ES" smtClean="0"/>
-              <a:t>27/03/2025</a:t>
+              <a:t>02/04/2026</a:t>
             </a:fld>
             <a:endParaRPr lang="es-ES"/>
           </a:p>
@@ -1242,7 +1242,7 @@
           <a:p>
             <a:fld id="{56871D7A-B4BD-4A2B-A34F-0C9175AAE7E4}" type="datetime1">
               <a:rPr lang="es-ES" smtClean="0"/>
-              <a:t>27/03/2025</a:t>
+              <a:t>02/04/2026</a:t>
             </a:fld>
             <a:endParaRPr lang="es-ES"/>
           </a:p>
@@ -1412,7 +1412,7 @@
           <a:p>
             <a:fld id="{EEF6077F-677E-4BE1-9902-7A31798E68D1}" type="datetime1">
               <a:rPr lang="es-ES" smtClean="0"/>
-              <a:t>27/03/2025</a:t>
+              <a:t>02/04/2026</a:t>
             </a:fld>
             <a:endParaRPr lang="es-ES"/>
           </a:p>
@@ -1658,7 +1658,7 @@
           <a:p>
             <a:fld id="{1109E1D9-B602-43F9-BF4B-0707A20957F2}" type="datetime1">
               <a:rPr lang="es-ES" smtClean="0"/>
-              <a:t>27/03/2025</a:t>
+              <a:t>02/04/2026</a:t>
             </a:fld>
             <a:endParaRPr lang="es-ES"/>
           </a:p>
@@ -1890,7 +1890,7 @@
           <a:p>
             <a:fld id="{0FFA2E47-5AE3-431B-8246-F5A8B8CF0D25}" type="datetime1">
               <a:rPr lang="es-ES" smtClean="0"/>
-              <a:t>27/03/2025</a:t>
+              <a:t>02/04/2026</a:t>
             </a:fld>
             <a:endParaRPr lang="es-ES"/>
           </a:p>
@@ -2257,7 +2257,7 @@
           <a:p>
             <a:fld id="{BBABFF6E-1D0A-4AD4-9BBD-5799E65C5B8B}" type="datetime1">
               <a:rPr lang="es-ES" smtClean="0"/>
-              <a:t>27/03/2025</a:t>
+              <a:t>02/04/2026</a:t>
             </a:fld>
             <a:endParaRPr lang="es-ES"/>
           </a:p>
@@ -2375,7 +2375,7 @@
           <a:p>
             <a:fld id="{9B04F6C7-B487-4CD1-863E-F541DE48BC6D}" type="datetime1">
               <a:rPr lang="es-ES" smtClean="0"/>
-              <a:t>27/03/2025</a:t>
+              <a:t>02/04/2026</a:t>
             </a:fld>
             <a:endParaRPr lang="es-ES"/>
           </a:p>
@@ -2470,7 +2470,7 @@
           <a:p>
             <a:fld id="{7F093902-2EAF-4520-BD05-28411CD109FB}" type="datetime1">
               <a:rPr lang="es-ES" smtClean="0"/>
-              <a:t>27/03/2025</a:t>
+              <a:t>02/04/2026</a:t>
             </a:fld>
             <a:endParaRPr lang="es-ES"/>
           </a:p>
@@ -2747,7 +2747,7 @@
           <a:p>
             <a:fld id="{61457DB4-6820-4D5D-BD84-9DDE2E35B24F}" type="datetime1">
               <a:rPr lang="es-ES" smtClean="0"/>
-              <a:t>27/03/2025</a:t>
+              <a:t>02/04/2026</a:t>
             </a:fld>
             <a:endParaRPr lang="es-ES"/>
           </a:p>
@@ -3004,7 +3004,7 @@
           <a:p>
             <a:fld id="{4E671443-258B-4339-A4C7-52404F89E785}" type="datetime1">
               <a:rPr lang="es-ES" smtClean="0"/>
-              <a:t>27/03/2025</a:t>
+              <a:t>02/04/2026</a:t>
             </a:fld>
             <a:endParaRPr lang="es-ES"/>
           </a:p>
@@ -3217,7 +3217,7 @@
           <a:p>
             <a:fld id="{2DF88706-3C86-4009-831E-A0F9C7B935C0}" type="datetime1">
               <a:rPr lang="es-ES" smtClean="0"/>
-              <a:t>27/03/2025</a:t>
+              <a:t>02/04/2026</a:t>
             </a:fld>
             <a:endParaRPr lang="es-ES"/>
           </a:p>
@@ -4181,8 +4181,8 @@
           </a:extLst>
         </p:spPr>
       </p:pic>
-      <mc:AlternateContent xmlns:mc="http://schemas.openxmlformats.org/markup-compatibility/2006">
-        <mc:Choice xmlns:a14="http://schemas.microsoft.com/office/drawing/2010/main" Requires="a14">
+      <mc:AlternateContent xmlns:mc="http://schemas.openxmlformats.org/markup-compatibility/2006" xmlns:a14="http://schemas.microsoft.com/office/drawing/2010/main">
+        <mc:Choice Requires="a14">
           <p:sp>
             <p:nvSpPr>
               <p:cNvPr id="10" name="CuadroTexto 9">
@@ -4418,7 +4418,7 @@
             </p:txBody>
           </p:sp>
         </mc:Choice>
-        <mc:Fallback>
+        <mc:Fallback xmlns="">
           <p:sp>
             <p:nvSpPr>
               <p:cNvPr id="10" name="CuadroTexto 9">
@@ -4463,8 +4463,8 @@
           </p:sp>
         </mc:Fallback>
       </mc:AlternateContent>
-      <mc:AlternateContent xmlns:mc="http://schemas.openxmlformats.org/markup-compatibility/2006">
-        <mc:Choice xmlns:a14="http://schemas.microsoft.com/office/drawing/2010/main" Requires="a14">
+      <mc:AlternateContent xmlns:mc="http://schemas.openxmlformats.org/markup-compatibility/2006" xmlns:a14="http://schemas.microsoft.com/office/drawing/2010/main">
+        <mc:Choice Requires="a14">
           <p:sp>
             <p:nvSpPr>
               <p:cNvPr id="3" name="CuadroTexto 2">
@@ -4580,7 +4580,7 @@
             </p:txBody>
           </p:sp>
         </mc:Choice>
-        <mc:Fallback>
+        <mc:Fallback xmlns="">
           <p:sp>
             <p:nvSpPr>
               <p:cNvPr id="3" name="CuadroTexto 2">
@@ -4625,8 +4625,8 @@
           </p:sp>
         </mc:Fallback>
       </mc:AlternateContent>
-      <mc:AlternateContent xmlns:mc="http://schemas.openxmlformats.org/markup-compatibility/2006">
-        <mc:Choice xmlns:a14="http://schemas.microsoft.com/office/drawing/2010/main" Requires="a14">
+      <mc:AlternateContent xmlns:mc="http://schemas.openxmlformats.org/markup-compatibility/2006" xmlns:a14="http://schemas.microsoft.com/office/drawing/2010/main">
+        <mc:Choice Requires="a14">
           <p:sp>
             <p:nvSpPr>
               <p:cNvPr id="5" name="CuadroTexto 4">
@@ -4791,7 +4791,7 @@
             </p:txBody>
           </p:sp>
         </mc:Choice>
-        <mc:Fallback>
+        <mc:Fallback xmlns="">
           <p:sp>
             <p:nvSpPr>
               <p:cNvPr id="5" name="CuadroTexto 4">
@@ -4836,8 +4836,8 @@
           </p:sp>
         </mc:Fallback>
       </mc:AlternateContent>
-      <mc:AlternateContent xmlns:mc="http://schemas.openxmlformats.org/markup-compatibility/2006">
-        <mc:Choice xmlns:a14="http://schemas.microsoft.com/office/drawing/2010/main" Requires="a14">
+      <mc:AlternateContent xmlns:mc="http://schemas.openxmlformats.org/markup-compatibility/2006" xmlns:a14="http://schemas.microsoft.com/office/drawing/2010/main">
+        <mc:Choice Requires="a14">
           <p:sp>
             <p:nvSpPr>
               <p:cNvPr id="13" name="CuadroTexto 12">
@@ -5115,7 +5115,7 @@
             </p:txBody>
           </p:sp>
         </mc:Choice>
-        <mc:Fallback>
+        <mc:Fallback xmlns="">
           <p:sp>
             <p:nvSpPr>
               <p:cNvPr id="13" name="CuadroTexto 12">
@@ -10702,7 +10702,13 @@
                                 <a:rPr lang="es-ES" b="0" i="1" smtClean="0">
                                   <a:latin typeface="Cambria Math" panose="02040503050406030204" pitchFamily="18" charset="0"/>
                                 </a:rPr>
-                                <m:t>=1</m:t>
+                                <m:t>=</m:t>
+                              </m:r>
+                              <m:r>
+                                <a:rPr lang="es-ES" b="0" i="1" smtClean="0">
+                                  <a:latin typeface="Cambria Math" panose="02040503050406030204" pitchFamily="18" charset="0"/>
+                                </a:rPr>
+                                <m:t>0</m:t>
                               </m:r>
                             </m:sub>
                             <m:sup>
@@ -10710,7 +10716,13 @@
                                 <a:rPr lang="es-ES" b="0" i="1" smtClean="0">
                                   <a:latin typeface="Cambria Math" panose="02040503050406030204" pitchFamily="18" charset="0"/>
                                 </a:rPr>
-                                <m:t>23</m:t>
+                                <m:t>2</m:t>
+                              </m:r>
+                              <m:r>
+                                <a:rPr lang="es-ES" b="0" i="1" smtClean="0">
+                                  <a:latin typeface="Cambria Math" panose="02040503050406030204" pitchFamily="18" charset="0"/>
+                                </a:rPr>
+                                <m:t>2</m:t>
                               </m:r>
                             </m:sup>
                             <m:e>
@@ -10772,13 +10784,7 @@
                                     <a:rPr lang="es-ES" b="0" i="1" smtClean="0">
                                       <a:latin typeface="Cambria Math" panose="02040503050406030204" pitchFamily="18" charset="0"/>
                                     </a:rPr>
-                                    <m:t>−</m:t>
-                                  </m:r>
-                                  <m:r>
-                                    <a:rPr lang="es-ES" b="0" i="1" smtClean="0">
-                                      <a:latin typeface="Cambria Math" panose="02040503050406030204" pitchFamily="18" charset="0"/>
-                                    </a:rPr>
-                                    <m:t>(</m:t>
+                                    <m:t>−(</m:t>
                                   </m:r>
                                   <m:r>
                                     <a:rPr lang="es-ES" b="0" i="1" smtClean="0">
@@ -11390,8 +11396,8 @@
           </p:sp>
         </mc:Fallback>
       </mc:AlternateContent>
-      <mc:AlternateContent xmlns:mc="http://schemas.openxmlformats.org/markup-compatibility/2006">
-        <mc:Choice xmlns:a14="http://schemas.microsoft.com/office/drawing/2010/main" Requires="a14">
+      <mc:AlternateContent xmlns:mc="http://schemas.openxmlformats.org/markup-compatibility/2006" xmlns:a14="http://schemas.microsoft.com/office/drawing/2010/main">
+        <mc:Choice Requires="a14">
           <p:sp>
             <p:nvSpPr>
               <p:cNvPr id="17" name="CuadroTexto 16">
@@ -11463,13 +11469,7 @@
                                 <a:rPr lang="es-ES" sz="2000" b="0" i="1" smtClean="0">
                                   <a:latin typeface="Cambria Math" panose="02040503050406030204" pitchFamily="18" charset="0"/>
                                 </a:rPr>
-                                <m:t>01</m:t>
-                              </m:r>
-                              <m:r>
-                                <a:rPr lang="es-ES" sz="2000" b="0" i="1" smtClean="0">
-                                  <a:latin typeface="Cambria Math" panose="02040503050406030204" pitchFamily="18" charset="0"/>
-                                </a:rPr>
-                                <m:t>111100</m:t>
+                                <m:t>01111100</m:t>
                               </m:r>
                             </m:e>
                           </m:d>
@@ -11533,7 +11533,7 @@
             </p:txBody>
           </p:sp>
         </mc:Choice>
-        <mc:Fallback>
+        <mc:Fallback xmlns="">
           <p:sp>
             <p:nvSpPr>
               <p:cNvPr id="17" name="CuadroTexto 16">
@@ -11718,8 +11718,8 @@
           </a:p>
         </p:txBody>
       </p:sp>
-      <mc:AlternateContent xmlns:mc="http://schemas.openxmlformats.org/markup-compatibility/2006">
-        <mc:Choice xmlns:a14="http://schemas.microsoft.com/office/drawing/2010/main" Requires="a14">
+      <mc:AlternateContent xmlns:mc="http://schemas.openxmlformats.org/markup-compatibility/2006" xmlns:a14="http://schemas.microsoft.com/office/drawing/2010/main">
+        <mc:Choice Requires="a14">
           <p:sp>
             <p:nvSpPr>
               <p:cNvPr id="3" name="CuadroTexto 2">
@@ -11769,7 +11769,7 @@
             </p:txBody>
           </p:sp>
         </mc:Choice>
-        <mc:Fallback>
+        <mc:Fallback xmlns="">
           <p:sp>
             <p:nvSpPr>
               <p:cNvPr id="3" name="CuadroTexto 2">
@@ -11858,8 +11858,8 @@
           </a:p>
         </p:txBody>
       </p:sp>
-      <mc:AlternateContent xmlns:mc="http://schemas.openxmlformats.org/markup-compatibility/2006">
-        <mc:Choice xmlns:a14="http://schemas.microsoft.com/office/drawing/2010/main" Requires="a14">
+      <mc:AlternateContent xmlns:mc="http://schemas.openxmlformats.org/markup-compatibility/2006" xmlns:a14="http://schemas.microsoft.com/office/drawing/2010/main">
+        <mc:Choice Requires="a14">
           <p:sp>
             <p:nvSpPr>
               <p:cNvPr id="6" name="CuadroTexto 5">
@@ -11909,7 +11909,7 @@
             </p:txBody>
           </p:sp>
         </mc:Choice>
-        <mc:Fallback>
+        <mc:Fallback xmlns="">
           <p:sp>
             <p:nvSpPr>
               <p:cNvPr id="6" name="CuadroTexto 5">
@@ -13101,8 +13101,8 @@
           </a:p>
         </p:txBody>
       </p:sp>
-      <mc:AlternateContent xmlns:mc="http://schemas.openxmlformats.org/markup-compatibility/2006">
-        <mc:Choice xmlns:a14="http://schemas.microsoft.com/office/drawing/2010/main" Requires="a14">
+      <mc:AlternateContent xmlns:mc="http://schemas.openxmlformats.org/markup-compatibility/2006" xmlns:a14="http://schemas.microsoft.com/office/drawing/2010/main">
+        <mc:Choice Requires="a14">
           <p:sp>
             <p:nvSpPr>
               <p:cNvPr id="15" name="CuadroTexto 14">
@@ -13299,7 +13299,7 @@
             </p:txBody>
           </p:sp>
         </mc:Choice>
-        <mc:Fallback>
+        <mc:Fallback xmlns="">
           <p:sp>
             <p:nvSpPr>
               <p:cNvPr id="15" name="CuadroTexto 14">
@@ -13865,8 +13865,8 @@
           </a:prstGeom>
         </p:spPr>
       </p:pic>
-      <mc:AlternateContent xmlns:mc="http://schemas.openxmlformats.org/markup-compatibility/2006">
-        <mc:Choice xmlns:a14="http://schemas.microsoft.com/office/drawing/2010/main" Requires="a14">
+      <mc:AlternateContent xmlns:mc="http://schemas.openxmlformats.org/markup-compatibility/2006" xmlns:a14="http://schemas.microsoft.com/office/drawing/2010/main">
+        <mc:Choice Requires="a14">
           <p:sp>
             <p:nvSpPr>
               <p:cNvPr id="12" name="CuadroTexto 11">
@@ -13916,7 +13916,7 @@
             </p:txBody>
           </p:sp>
         </mc:Choice>
-        <mc:Fallback>
+        <mc:Fallback xmlns="">
           <p:sp>
             <p:nvSpPr>
               <p:cNvPr id="12" name="CuadroTexto 11">
